--- a/CraftLink_AI_SIH2026.pptx
+++ b/CraftLink_AI_SIH2026.pptx
@@ -5176,7 +5176,7 @@
                 </a:solidFill>
                 <a:latin typeface="Calibri"/>
               </a:rPr>
-              <a:t>Bhashini / Whisper speech-to-text — no typing, no English.</a:t>
+              <a:t>Whisper speech-to-text, running offline — no typing, no English.</a:t>
             </a:r>
           </a:p>
         </p:txBody>
@@ -5409,7 +5409,7 @@
                 </a:solidFill>
                 <a:latin typeface="Calibri"/>
               </a:rPr>
-              <a:t>Evidence-based price</a:t>
+              <a:t>Explained price</a:t>
             </a:r>
           </a:p>
           <a:p>
@@ -5428,7 +5428,7 @@
                 </a:solidFill>
                 <a:latin typeface="Calibri"/>
               </a:rPr>
-              <a:t>Materials + labour + comparable market bands.</a:t>
+              <a:t>Materials, labour, market bands and signals read from the photo and description.</a:t>
             </a:r>
           </a:p>
         </p:txBody>
@@ -5554,7 +5554,7 @@
                 </a:solidFill>
                 <a:latin typeface="Calibri"/>
               </a:rPr>
-              <a:t>ONDC-ready; publishes into MoSJE’s Bharat-TULIP.</a:t>
+              <a:t>ONDC/GeM-ready fields; bulk buyers enquire and the artisan quotes back in-app.</a:t>
             </a:r>
           </a:p>
         </p:txBody>
@@ -6836,7 +6836,7 @@
                 </a:solidFill>
                 <a:latin typeface="Calibri"/>
               </a:rPr>
-              <a:t>Speech-to-text — Bhashini ASR, Whisper</a:t>
+              <a:t>Speech-to-text — faster-whisper (offline)</a:t>
             </a:r>
           </a:p>
         </p:txBody>
@@ -6875,7 +6875,7 @@
                 </a:solidFill>
                 <a:latin typeface="Calibri"/>
               </a:rPr>
-              <a:t>LLM — multilingual listing generation</a:t>
+              <a:t>NLLB-200 — offline translation, 9 languages</a:t>
             </a:r>
           </a:p>
         </p:txBody>
@@ -6992,7 +6992,7 @@
                 </a:solidFill>
                 <a:latin typeface="Calibri"/>
               </a:rPr>
-              <a:t>React + TypeScript + Tailwind</a:t>
+              <a:t>React + Vite + Tailwind</a:t>
             </a:r>
           </a:p>
         </p:txBody>
@@ -7031,7 +7031,7 @@
                 </a:solidFill>
                 <a:latin typeface="Calibri"/>
               </a:rPr>
-              <a:t>Mobile-first PWA · Recharts</a:t>
+              <a:t>Installable PWA + Android APK (Capacitor)</a:t>
             </a:r>
           </a:p>
         </p:txBody>
@@ -7226,7 +7226,7 @@
                 </a:solidFill>
                 <a:latin typeface="Calibri"/>
               </a:rPr>
-              <a:t>ONDC Seller Network APIs</a:t>
+              <a:t>ONDC/GeM-ready catalogue fields</a:t>
             </a:r>
           </a:p>
         </p:txBody>
@@ -7265,7 +7265,7 @@
                 </a:solidFill>
                 <a:latin typeface="Calibri"/>
               </a:rPr>
-              <a:t>Bharat-TULIP (MoSJE) publishing</a:t>
+              <a:t>In-app B2B bulk-quote workflow</a:t>
             </a:r>
           </a:p>
         </p:txBody>
@@ -7389,7 +7389,7 @@
                 </a:solidFill>
                 <a:latin typeface="Calibri"/>
               </a:rPr>
-              <a:t>Prototype status:  </a:t>
+              <a:t>Build status:  photo → voice → 9-language listing → price → order → bulk quote, offline, today.</a:t>
             </a:r>
             <a:r>
               <a:rPr sz="900" b="0" i="0">
@@ -7398,7 +7398,7 @@
                 </a:solidFill>
                 <a:latin typeface="Calibri"/>
               </a:rPr>
-              <a:t>photo → voice → listing → price → order runs end to end today.</a:t>
+              <a:t/>
             </a:r>
           </a:p>
         </p:txBody>
@@ -8308,7 +8308,7 @@
                 </a:solidFill>
                 <a:latin typeface="Calibri"/>
               </a:rPr>
-              <a:t>LLM listing copy</a:t>
+              <a:t>Listing copy, 9 languages</a:t>
             </a:r>
           </a:p>
         </p:txBody>
@@ -8600,7 +8600,7 @@
                 </a:solidFill>
                 <a:latin typeface="Calibri"/>
               </a:rPr>
-              <a:t>Evidence-based price</a:t>
+              <a:t>Explained price</a:t>
             </a:r>
           </a:p>
         </p:txBody>
@@ -11450,7 +11450,7 @@
                 </a:solidFill>
                 <a:latin typeface="Calibri"/>
               </a:rPr>
-              <a:t>AI integration</a:t>
+              <a:t>AI integration  Vision, Whisper ASR, NLLB-200 and ML automate clean-up, copy and pricing.</a:t>
             </a:r>
             <a:r>
               <a:rPr sz="950" b="0" i="0">
@@ -11459,7 +11459,7 @@
                 </a:solidFill>
                 <a:latin typeface="Calibri"/>
               </a:rPr>
-              <a:t>  </a:t>
+              <a:t/>
             </a:r>
             <a:r>
               <a:rPr sz="950" b="0" i="0">
@@ -11468,7 +11468,7 @@
                 </a:solidFill>
                 <a:latin typeface="Calibri"/>
               </a:rPr>
-              <a:t>Vision, ASR, LLM and ML models automate clean-up, copy and pricing.</a:t>
+              <a:t/>
             </a:r>
           </a:p>
         </p:txBody>
@@ -11507,7 +11507,7 @@
                 </a:solidFill>
                 <a:latin typeface="Calibri"/>
               </a:rPr>
-              <a:t>Mobile-first delivery</a:t>
+              <a:t>Mobile-first delivery  React + FastAPI, shipped as an Android APK and an offline-capable PWA.</a:t>
             </a:r>
             <a:r>
               <a:rPr sz="950" b="0" i="0">
@@ -11516,7 +11516,7 @@
                 </a:solidFill>
                 <a:latin typeface="Calibri"/>
               </a:rPr>
-              <a:t>  </a:t>
+              <a:t/>
             </a:r>
             <a:r>
               <a:rPr sz="950" b="0" i="0">
@@ -11525,7 +11525,7 @@
                 </a:solidFill>
                 <a:latin typeface="Calibri"/>
               </a:rPr>
-              <a:t>React + FastAPI shipped as an installable PWA — no special hardware.</a:t>
+              <a:t/>
             </a:r>
           </a:p>
         </p:txBody>
@@ -11621,7 +11621,7 @@
                 </a:solidFill>
                 <a:latin typeface="Calibri"/>
               </a:rPr>
-              <a:t>Proven stack</a:t>
+              <a:t>Proven stack  Every component is open-source and already running in our build.</a:t>
             </a:r>
             <a:r>
               <a:rPr sz="950" b="0" i="0">
@@ -11630,7 +11630,7 @@
                 </a:solidFill>
                 <a:latin typeface="Calibri"/>
               </a:rPr>
-              <a:t>  </a:t>
+              <a:t/>
             </a:r>
             <a:r>
               <a:rPr sz="950" b="0" i="0">
@@ -11639,7 +11639,7 @@
                 </a:solidFill>
                 <a:latin typeface="Calibri"/>
               </a:rPr>
-              <a:t>Every component is open-source and already running in our prototype.</a:t>
+              <a:t/>
             </a:r>
           </a:p>
         </p:txBody>
@@ -12273,7 +12273,7 @@
                 </a:solidFill>
                 <a:latin typeface="Calibri"/>
               </a:rPr>
-              <a:t>Low-cost to operate</a:t>
+              <a:t>Low-cost to operate  Every model runs offline on our own server; no per-call API bill.</a:t>
             </a:r>
             <a:r>
               <a:rPr sz="950" b="0" i="0">
@@ -12282,7 +12282,7 @@
                 </a:solidFill>
                 <a:latin typeface="Calibri"/>
               </a:rPr>
-              <a:t>  </a:t>
+              <a:t/>
             </a:r>
             <a:r>
               <a:rPr sz="950" b="0" i="0">
@@ -12291,7 +12291,7 @@
                 </a:solidFill>
                 <a:latin typeface="Calibri"/>
               </a:rPr>
-              <a:t>Open-source models plus Bhashini’s free government APIs.</a:t>
+              <a:t/>
             </a:r>
           </a:p>
         </p:txBody>
@@ -13039,7 +13039,7 @@
                 </a:solidFill>
                 <a:latin typeface="Calibri"/>
               </a:rPr>
-              <a:t>Dual ASR path</a:t>
+              <a:t>Two-pass ASR  A fast Whisper pass, with a large-v3 re-run whenever confidence drops.</a:t>
             </a:r>
             <a:r>
               <a:rPr sz="950" b="0" i="0">
@@ -13048,7 +13048,7 @@
                 </a:solidFill>
                 <a:latin typeface="Calibri"/>
               </a:rPr>
-              <a:t>  </a:t>
+              <a:t/>
             </a:r>
             <a:r>
               <a:rPr sz="950" b="0" i="0">
@@ -13057,7 +13057,7 @@
                 </a:solidFill>
                 <a:latin typeface="Calibri"/>
               </a:rPr>
-              <a:t>Bhashini for coverage, Whisper on-device for weak connectivity.</a:t>
+              <a:t/>
             </a:r>
           </a:p>
         </p:txBody>
@@ -13425,7 +13425,7 @@
                 </a:solidFill>
                 <a:latin typeface="Calibri"/>
               </a:rPr>
-              <a:t>Working prototype runs end to end today.</a:t>
+              <a:t>Photo → voice → 9-language listing → price → order → bulk quote, end to end.</a:t>
             </a:r>
           </a:p>
         </p:txBody>
@@ -13524,7 +13524,7 @@
                 </a:solidFill>
                 <a:latin typeface="Calibri"/>
               </a:rPr>
-              <a:t>Android/PWA pilot — one cluster, 3 languages.</a:t>
+              <a:t>Cluster pilot on the Android APK — 9 languages, offline.</a:t>
             </a:r>
           </a:p>
         </p:txBody>
@@ -13623,7 +13623,7 @@
                 </a:solidFill>
                 <a:latin typeface="Calibri"/>
               </a:rPr>
-              <a:t>Bhashini’s 22 languages; ONDC + TULIP live.</a:t>
+              <a:t>Bhashini APIs for the remaining scheduled languages; certified ONDC onboarding.</a:t>
             </a:r>
           </a:p>
         </p:txBody>
@@ -14393,7 +14393,7 @@
                 </a:solidFill>
                 <a:latin typeface="Cambria"/>
               </a:rPr>
-              <a:t>22</a:t>
+              <a:t>9</a:t>
             </a:r>
           </a:p>
         </p:txBody>
@@ -14432,7 +14432,7 @@
                 </a:solidFill>
                 <a:latin typeface="Calibri"/>
               </a:rPr>
-              <a:t>scheduled languages via Bhashini</a:t>
+              <a:t>Indian languages in the app today</a:t>
             </a:r>
           </a:p>
         </p:txBody>
@@ -15465,7 +15465,7 @@
                 </a:solidFill>
                 <a:latin typeface="Calibri"/>
               </a:rPr>
-              <a:t>▪  </a:t>
+              <a:t>▪  Language-inclusive commerce  Voice, screen and listings in 9 Indian languages, offline.</a:t>
             </a:r>
             <a:r>
               <a:rPr sz="1000" b="1" i="0">
@@ -15474,7 +15474,7 @@
                 </a:solidFill>
                 <a:latin typeface="Calibri"/>
               </a:rPr>
-              <a:t>Language-inclusive commerce</a:t>
+              <a:t/>
             </a:r>
             <a:r>
               <a:rPr sz="950" b="0" i="0">
@@ -15483,7 +15483,7 @@
                 </a:solidFill>
                 <a:latin typeface="Calibri"/>
               </a:rPr>
-              <a:t>  Voice in the maker’s own language; Bhashini spans all 22.</a:t>
+              <a:t/>
             </a:r>
           </a:p>
         </p:txBody>
@@ -18798,7 +18798,7 @@
                 </a:solidFill>
                 <a:latin typeface="Calibri"/>
               </a:rPr>
-              <a:t>BUILT ON INDIA’S DIGITAL PUBLIC INFRASTRUCTURE</a:t>
+              <a:t>DESIGNED TO PLUG INTO INDIA’S DIGITAL PUBLIC INFRASTRUCTURE</a:t>
             </a:r>
           </a:p>
         </p:txBody>
@@ -18921,7 +18921,7 @@
                 </a:solidFill>
                 <a:latin typeface="Calibri"/>
               </a:rPr>
-              <a:t>language access</a:t>
+              <a:t>on the roadmap</a:t>
             </a:r>
           </a:p>
         </p:txBody>
